--- a/documents/JCA/regional_anaesthesia_figures_JCA_EN.pptx
+++ b/documents/JCA/regional_anaesthesia_figures_JCA_EN.pptx
@@ -3137,7 +3137,7 @@
         <p:spPr>
           <a:xfrm>
             <a:off x="1645920" y="914400"/>
-            <a:ext cx="8869680" cy="10462158"/>
+            <a:ext cx="8869680" cy="10470526"/>
           </a:xfrm>
           <a:prstGeom prst="rect">
             <a:avLst/>
